--- a/assets/powerpoints/module-n3-epicerie/B3-demander-de-l-aide.pptx
+++ b/assets/powerpoints/module-n3-epicerie/B3-demander-de-l-aide.pptx
@@ -8669,7 +8669,61 @@
                 </a:solidFill>
                 <a:latin typeface="Verdana"/>
               </a:rPr>
-              <a:t>« &lt;b&gt;Où est&lt;/b&gt; le riz ? » — court et clair. « &lt;b&gt;Je cherche&lt;/b&gt; le riz. » — encore plus simple, et c'est la formule la plus employée. « &lt;b&gt;Pourriez-vous m'indiquer&lt;/b&gt; le riz ? » — plus long, plus poli. Choisissez celle que vous direz sans hésiter : c'est la meilleure pour vous.</a:t>
+              <a:t>« </a:t>
+            </a:r>
+            <a:r>
+              <a:rPr sz="2000" b="1" i="0">
+                <a:solidFill>
+                  <a:srgbClr val="4B4F52"/>
+                </a:solidFill>
+                <a:latin typeface="Verdana"/>
+              </a:rPr>
+              <a:t>Où est</a:t>
+            </a:r>
+            <a:r>
+              <a:rPr sz="2000" b="0" i="0">
+                <a:solidFill>
+                  <a:srgbClr val="4B4F52"/>
+                </a:solidFill>
+                <a:latin typeface="Verdana"/>
+              </a:rPr>
+              <a:t> le riz ? » — court et clair. « </a:t>
+            </a:r>
+            <a:r>
+              <a:rPr sz="2000" b="1" i="0">
+                <a:solidFill>
+                  <a:srgbClr val="4B4F52"/>
+                </a:solidFill>
+                <a:latin typeface="Verdana"/>
+              </a:rPr>
+              <a:t>Je cherche</a:t>
+            </a:r>
+            <a:r>
+              <a:rPr sz="2000" b="0" i="0">
+                <a:solidFill>
+                  <a:srgbClr val="4B4F52"/>
+                </a:solidFill>
+                <a:latin typeface="Verdana"/>
+              </a:rPr>
+              <a:t> le riz. » — encore plus simple, et c'est la formule la plus employée. « </a:t>
+            </a:r>
+            <a:r>
+              <a:rPr sz="2000" b="1" i="0">
+                <a:solidFill>
+                  <a:srgbClr val="4B4F52"/>
+                </a:solidFill>
+                <a:latin typeface="Verdana"/>
+              </a:rPr>
+              <a:t>Pourriez-vous m'indiquer</a:t>
+            </a:r>
+            <a:r>
+              <a:rPr sz="2000" b="0" i="0">
+                <a:solidFill>
+                  <a:srgbClr val="4B4F52"/>
+                </a:solidFill>
+                <a:latin typeface="Verdana"/>
+              </a:rPr>
+              <a:t> le riz ? » — plus long, plus poli. Choisissez celle que vous direz sans hésiter : c'est la meilleure pour vous.</a:t>
             </a:r>
           </a:p>
         </p:txBody>
